--- a/.tmp/KaunterAI-Pitch-Deck.pptx
+++ b/.tmp/KaunterAI-Pitch-Deck.pptx
@@ -1126,7 +1126,7 @@
           <a:p>
             <a:r>
               <a:rPr lang="en-US" dirty="0"/>
-              <a:t>APPENDIX ONLY.,KaunterAI must reach category parity on messaging, booking, schedules, and job records.,The wedge is governed vertical knowledge: correction evidence becomes a proposed operating rule that a human approves.,The Malaysia roadmap adds TNG QR handling, MyInvois e-Invoice workflows, and PDF extraction into structured Excel records.,The strategy is one vertical first, then reuse the workflow and localization layer across adjacent field services.,BOUNDARY: TNG QR, MyInvois, and PDF-to-Excel are roadmap items, not current shipped proof.,BOUNDARY: This positioning is based on public product capabilities, not measured market share.</a:t>
+              <a:t>APPENDIX ONLY.,The MSME advantage is practical: reply while the team is on-site, convert more enquiries into bookings, and keep service decisions consistent without hiring a larger back office.,KaunterAI must still reach category parity on messaging, booking, schedules, and job records.,The durable wedge is governed vertical knowledge: correction evidence becomes a proposed operating rule that a human approves, so the operator's service quality can compound.,The Malaysia roadmap adds TNG QR handling, MyInvois e-Invoice workflows, and PDF extraction into structured Excel records.,The strategy is one vertical first, then reuse the workflow and localization layer across adjacent field services.,BOUNDARY: TNG QR, MyInvois, and PDF-to-Excel are roadmap items, not current shipped proof.,BOUNDARY: This positioning is based on public product capabilities, not measured market share.</a:t>
             </a:r>
             <a:endParaRPr lang="en-US" dirty="0"/>
           </a:p>
